--- a/dapr3_lectures/block2_fa/img_sandbox/terminology.pptx
+++ b/dapr3_lectures/block2_fa/img_sandbox/terminology.pptx
@@ -7,6 +7,7 @@
   <p:sldIdLst>
     <p:sldId id="258" r:id="rId2"/>
     <p:sldId id="257" r:id="rId3"/>
+    <p:sldId id="259" r:id="rId4"/>
   </p:sldIdLst>
   <p:sldSz cx="12192000" cy="6858000"/>
   <p:notesSz cx="6858000" cy="9144000"/>
@@ -262,7 +263,7 @@
           <a:p>
             <a:fld id="{39DDFA17-997A-491E-8292-BAB2245289D1}" type="datetimeFigureOut">
               <a:rPr lang="en-GB" smtClean="0"/>
-              <a:t>27/10/2025</a:t>
+              <a:t>01/06/2026</a:t>
             </a:fld>
             <a:endParaRPr lang="en-GB"/>
           </a:p>
@@ -462,7 +463,7 @@
           <a:p>
             <a:fld id="{39DDFA17-997A-491E-8292-BAB2245289D1}" type="datetimeFigureOut">
               <a:rPr lang="en-GB" smtClean="0"/>
-              <a:t>27/10/2025</a:t>
+              <a:t>01/06/2026</a:t>
             </a:fld>
             <a:endParaRPr lang="en-GB"/>
           </a:p>
@@ -672,7 +673,7 @@
           <a:p>
             <a:fld id="{39DDFA17-997A-491E-8292-BAB2245289D1}" type="datetimeFigureOut">
               <a:rPr lang="en-GB" smtClean="0"/>
-              <a:t>27/10/2025</a:t>
+              <a:t>01/06/2026</a:t>
             </a:fld>
             <a:endParaRPr lang="en-GB"/>
           </a:p>
@@ -872,7 +873,7 @@
           <a:p>
             <a:fld id="{39DDFA17-997A-491E-8292-BAB2245289D1}" type="datetimeFigureOut">
               <a:rPr lang="en-GB" smtClean="0"/>
-              <a:t>27/10/2025</a:t>
+              <a:t>01/06/2026</a:t>
             </a:fld>
             <a:endParaRPr lang="en-GB"/>
           </a:p>
@@ -1148,7 +1149,7 @@
           <a:p>
             <a:fld id="{39DDFA17-997A-491E-8292-BAB2245289D1}" type="datetimeFigureOut">
               <a:rPr lang="en-GB" smtClean="0"/>
-              <a:t>27/10/2025</a:t>
+              <a:t>01/06/2026</a:t>
             </a:fld>
             <a:endParaRPr lang="en-GB"/>
           </a:p>
@@ -1416,7 +1417,7 @@
           <a:p>
             <a:fld id="{39DDFA17-997A-491E-8292-BAB2245289D1}" type="datetimeFigureOut">
               <a:rPr lang="en-GB" smtClean="0"/>
-              <a:t>27/10/2025</a:t>
+              <a:t>01/06/2026</a:t>
             </a:fld>
             <a:endParaRPr lang="en-GB"/>
           </a:p>
@@ -1831,7 +1832,7 @@
           <a:p>
             <a:fld id="{39DDFA17-997A-491E-8292-BAB2245289D1}" type="datetimeFigureOut">
               <a:rPr lang="en-GB" smtClean="0"/>
-              <a:t>27/10/2025</a:t>
+              <a:t>01/06/2026</a:t>
             </a:fld>
             <a:endParaRPr lang="en-GB"/>
           </a:p>
@@ -1973,7 +1974,7 @@
           <a:p>
             <a:fld id="{39DDFA17-997A-491E-8292-BAB2245289D1}" type="datetimeFigureOut">
               <a:rPr lang="en-GB" smtClean="0"/>
-              <a:t>27/10/2025</a:t>
+              <a:t>01/06/2026</a:t>
             </a:fld>
             <a:endParaRPr lang="en-GB"/>
           </a:p>
@@ -2086,7 +2087,7 @@
           <a:p>
             <a:fld id="{39DDFA17-997A-491E-8292-BAB2245289D1}" type="datetimeFigureOut">
               <a:rPr lang="en-GB" smtClean="0"/>
-              <a:t>27/10/2025</a:t>
+              <a:t>01/06/2026</a:t>
             </a:fld>
             <a:endParaRPr lang="en-GB"/>
           </a:p>
@@ -2399,7 +2400,7 @@
           <a:p>
             <a:fld id="{39DDFA17-997A-491E-8292-BAB2245289D1}" type="datetimeFigureOut">
               <a:rPr lang="en-GB" smtClean="0"/>
-              <a:t>27/10/2025</a:t>
+              <a:t>01/06/2026</a:t>
             </a:fld>
             <a:endParaRPr lang="en-GB"/>
           </a:p>
@@ -2688,7 +2689,7 @@
           <a:p>
             <a:fld id="{39DDFA17-997A-491E-8292-BAB2245289D1}" type="datetimeFigureOut">
               <a:rPr lang="en-GB" smtClean="0"/>
-              <a:t>27/10/2025</a:t>
+              <a:t>01/06/2026</a:t>
             </a:fld>
             <a:endParaRPr lang="en-GB"/>
           </a:p>
@@ -2931,7 +2932,7 @@
           <a:p>
             <a:fld id="{39DDFA17-997A-491E-8292-BAB2245289D1}" type="datetimeFigureOut">
               <a:rPr lang="en-GB" smtClean="0"/>
-              <a:t>27/10/2025</a:t>
+              <a:t>01/06/2026</a:t>
             </a:fld>
             <a:endParaRPr lang="en-GB"/>
           </a:p>
@@ -4106,6 +4107,343 @@
 </p:sld>
 </file>
 
+<file path=ppt/slides/slide3.xml><?xml version="1.0" encoding="utf-8"?>
+<p:sld xmlns:a="http://schemas.openxmlformats.org/drawingml/2006/main" xmlns:r="http://schemas.openxmlformats.org/officeDocument/2006/relationships" xmlns:p="http://schemas.openxmlformats.org/presentationml/2006/main">
+  <p:cSld>
+    <p:spTree>
+      <p:nvGrpSpPr>
+        <p:cNvPr id="1" name=""/>
+        <p:cNvGrpSpPr/>
+        <p:nvPr/>
+      </p:nvGrpSpPr>
+      <p:grpSpPr>
+        <a:xfrm>
+          <a:off x="0" y="0"/>
+          <a:ext cx="0" cy="0"/>
+          <a:chOff x="0" y="0"/>
+          <a:chExt cx="0" cy="0"/>
+        </a:xfrm>
+      </p:grpSpPr>
+      <p:sp>
+        <p:nvSpPr>
+          <p:cNvPr id="5" name="TextBox 4">
+            <a:extLst>
+              <a:ext uri="{FF2B5EF4-FFF2-40B4-BE49-F238E27FC236}">
+                <a16:creationId xmlns:a16="http://schemas.microsoft.com/office/drawing/2014/main" id="{FAA92C4B-A3A7-4835-8E2D-A9A14CF55A36}"/>
+              </a:ext>
+            </a:extLst>
+          </p:cNvPr>
+          <p:cNvSpPr txBox="1"/>
+          <p:nvPr/>
+        </p:nvSpPr>
+        <p:spPr>
+          <a:xfrm>
+            <a:off x="101600" y="104213"/>
+            <a:ext cx="5511800" cy="1815882"/>
+          </a:xfrm>
+          <a:prstGeom prst="rect">
+            <a:avLst/>
+          </a:prstGeom>
+          <a:noFill/>
+          <a:ln>
+            <a:solidFill>
+              <a:schemeClr val="tx1"/>
+            </a:solidFill>
+          </a:ln>
+        </p:spPr>
+        <p:txBody>
+          <a:bodyPr wrap="square">
+            <a:spAutoFit/>
+          </a:bodyPr>
+          <a:lstStyle/>
+          <a:p>
+            <a:r>
+              <a:rPr lang="en-GB" sz="2800" b="1" dirty="0">
+                <a:effectLst/>
+                <a:latin typeface="Goudy Old Style" panose="02020502050305020303" pitchFamily="18" charset="0"/>
+              </a:rPr>
+              <a:t>things that capture lots of constructs</a:t>
+            </a:r>
+            <a:endParaRPr lang="en-GB" sz="2800" b="0" dirty="0">
+              <a:effectLst/>
+              <a:latin typeface="Goudy Old Style" panose="02020502050305020303" pitchFamily="18" charset="0"/>
+            </a:endParaRPr>
+          </a:p>
+          <a:p>
+            <a:endParaRPr lang="en-GB" sz="2800" i="1" dirty="0">
+              <a:latin typeface="Goudy Old Style" panose="02020502050305020303" pitchFamily="18" charset="0"/>
+            </a:endParaRPr>
+          </a:p>
+          <a:p>
+            <a:endParaRPr lang="en-GB" sz="2800" b="0" i="1" dirty="0">
+              <a:effectLst/>
+              <a:latin typeface="Goudy Old Style" panose="02020502050305020303" pitchFamily="18" charset="0"/>
+            </a:endParaRPr>
+          </a:p>
+          <a:p>
+            <a:endParaRPr lang="en-GB" sz="2800" b="0" i="1" dirty="0">
+              <a:effectLst/>
+              <a:latin typeface="Goudy Old Style" panose="02020502050305020303" pitchFamily="18" charset="0"/>
+            </a:endParaRPr>
+          </a:p>
+        </p:txBody>
+      </p:sp>
+      <p:sp>
+        <p:nvSpPr>
+          <p:cNvPr id="7" name="TextBox 6">
+            <a:extLst>
+              <a:ext uri="{FF2B5EF4-FFF2-40B4-BE49-F238E27FC236}">
+                <a16:creationId xmlns:a16="http://schemas.microsoft.com/office/drawing/2014/main" id="{80F809BA-8904-4BA3-AB79-67F500F573C6}"/>
+              </a:ext>
+            </a:extLst>
+          </p:cNvPr>
+          <p:cNvSpPr txBox="1"/>
+          <p:nvPr/>
+        </p:nvSpPr>
+        <p:spPr>
+          <a:xfrm>
+            <a:off x="6155267" y="119250"/>
+            <a:ext cx="5630333" cy="2246769"/>
+          </a:xfrm>
+          <a:prstGeom prst="rect">
+            <a:avLst/>
+          </a:prstGeom>
+          <a:noFill/>
+          <a:ln>
+            <a:solidFill>
+              <a:schemeClr val="tx1"/>
+            </a:solidFill>
+          </a:ln>
+        </p:spPr>
+        <p:txBody>
+          <a:bodyPr wrap="square">
+            <a:spAutoFit/>
+          </a:bodyPr>
+          <a:lstStyle/>
+          <a:p>
+            <a:r>
+              <a:rPr lang="en-GB" sz="2800" b="1" dirty="0">
+                <a:effectLst/>
+                <a:latin typeface="Goudy Old Style" panose="02020502050305020303" pitchFamily="18" charset="0"/>
+              </a:rPr>
+              <a:t>things that capture a single (often, but not necessarily, unidimensional) construct</a:t>
+            </a:r>
+            <a:endParaRPr lang="en-GB" sz="2800" b="0" dirty="0">
+              <a:effectLst/>
+              <a:latin typeface="Goudy Old Style" panose="02020502050305020303" pitchFamily="18" charset="0"/>
+            </a:endParaRPr>
+          </a:p>
+          <a:p>
+            <a:endParaRPr lang="en-GB" sz="2800" b="0" i="1" dirty="0">
+              <a:effectLst/>
+              <a:latin typeface="Goudy Old Style" panose="02020502050305020303" pitchFamily="18" charset="0"/>
+            </a:endParaRPr>
+          </a:p>
+          <a:p>
+            <a:endParaRPr lang="en-GB" sz="2800" b="0" i="1" dirty="0">
+              <a:effectLst/>
+              <a:latin typeface="Goudy Old Style" panose="02020502050305020303" pitchFamily="18" charset="0"/>
+            </a:endParaRPr>
+          </a:p>
+        </p:txBody>
+      </p:sp>
+      <p:sp>
+        <p:nvSpPr>
+          <p:cNvPr id="8" name="TextBox 7">
+            <a:extLst>
+              <a:ext uri="{FF2B5EF4-FFF2-40B4-BE49-F238E27FC236}">
+                <a16:creationId xmlns:a16="http://schemas.microsoft.com/office/drawing/2014/main" id="{3FBEF357-017B-4356-83E6-6E62049B724B}"/>
+              </a:ext>
+            </a:extLst>
+          </p:cNvPr>
+          <p:cNvSpPr txBox="1"/>
+          <p:nvPr/>
+        </p:nvSpPr>
+        <p:spPr>
+          <a:xfrm>
+            <a:off x="101600" y="2279067"/>
+            <a:ext cx="5630333" cy="1815882"/>
+          </a:xfrm>
+          <a:prstGeom prst="rect">
+            <a:avLst/>
+          </a:prstGeom>
+          <a:noFill/>
+          <a:ln>
+            <a:solidFill>
+              <a:schemeClr val="tx1"/>
+            </a:solidFill>
+          </a:ln>
+        </p:spPr>
+        <p:txBody>
+          <a:bodyPr wrap="square">
+            <a:spAutoFit/>
+          </a:bodyPr>
+          <a:lstStyle/>
+          <a:p>
+            <a:r>
+              <a:rPr lang="en-GB" sz="2800" b="1" dirty="0">
+                <a:effectLst/>
+                <a:latin typeface="Goudy Old Style" panose="02020502050305020303" pitchFamily="18" charset="0"/>
+              </a:rPr>
+              <a:t>individual things that each elicit a participant's input</a:t>
+            </a:r>
+            <a:endParaRPr lang="en-GB" sz="2800" b="0" dirty="0">
+              <a:effectLst/>
+              <a:latin typeface="Goudy Old Style" panose="02020502050305020303" pitchFamily="18" charset="0"/>
+            </a:endParaRPr>
+          </a:p>
+          <a:p>
+            <a:endParaRPr lang="en-GB" sz="2800" b="0" i="1" dirty="0">
+              <a:effectLst/>
+              <a:latin typeface="Goudy Old Style" panose="02020502050305020303" pitchFamily="18" charset="0"/>
+            </a:endParaRPr>
+          </a:p>
+          <a:p>
+            <a:endParaRPr lang="en-GB" sz="2800" b="0" i="1" dirty="0">
+              <a:effectLst/>
+              <a:latin typeface="Goudy Old Style" panose="02020502050305020303" pitchFamily="18" charset="0"/>
+            </a:endParaRPr>
+          </a:p>
+        </p:txBody>
+      </p:sp>
+      <p:sp>
+        <p:nvSpPr>
+          <p:cNvPr id="9" name="TextBox 8">
+            <a:extLst>
+              <a:ext uri="{FF2B5EF4-FFF2-40B4-BE49-F238E27FC236}">
+                <a16:creationId xmlns:a16="http://schemas.microsoft.com/office/drawing/2014/main" id="{17411245-E09C-45A9-A15C-EEDC85D82054}"/>
+              </a:ext>
+            </a:extLst>
+          </p:cNvPr>
+          <p:cNvSpPr txBox="1"/>
+          <p:nvPr/>
+        </p:nvSpPr>
+        <p:spPr>
+          <a:xfrm>
+            <a:off x="6155266" y="2540677"/>
+            <a:ext cx="5630333" cy="2246769"/>
+          </a:xfrm>
+          <a:prstGeom prst="rect">
+            <a:avLst/>
+          </a:prstGeom>
+          <a:noFill/>
+          <a:ln>
+            <a:solidFill>
+              <a:schemeClr val="tx1"/>
+            </a:solidFill>
+          </a:ln>
+        </p:spPr>
+        <p:txBody>
+          <a:bodyPr wrap="square">
+            <a:spAutoFit/>
+          </a:bodyPr>
+          <a:lstStyle/>
+          <a:p>
+            <a:r>
+              <a:rPr lang="en-GB" sz="2800" b="1" dirty="0">
+                <a:effectLst/>
+                <a:latin typeface="Goudy Old Style" panose="02020502050305020303" pitchFamily="18" charset="0"/>
+              </a:rPr>
+              <a:t>ways in which each participant input on each individual thing </a:t>
+            </a:r>
+            <a:r>
+              <a:rPr lang="en-GB" sz="2800" b="1" dirty="0">
+                <a:latin typeface="Goudy Old Style" panose="02020502050305020303" pitchFamily="18" charset="0"/>
+              </a:rPr>
+              <a:t>is</a:t>
+            </a:r>
+            <a:r>
+              <a:rPr lang="en-GB" sz="2800" b="1" dirty="0">
+                <a:effectLst/>
+                <a:latin typeface="Goudy Old Style" panose="02020502050305020303" pitchFamily="18" charset="0"/>
+              </a:rPr>
+              <a:t> translated to numbers</a:t>
+            </a:r>
+            <a:endParaRPr lang="en-GB" sz="2800" b="0" dirty="0">
+              <a:effectLst/>
+              <a:latin typeface="Goudy Old Style" panose="02020502050305020303" pitchFamily="18" charset="0"/>
+            </a:endParaRPr>
+          </a:p>
+          <a:p>
+            <a:endParaRPr lang="en-GB" sz="2800" b="0" i="1" dirty="0">
+              <a:effectLst/>
+              <a:latin typeface="Goudy Old Style" panose="02020502050305020303" pitchFamily="18" charset="0"/>
+            </a:endParaRPr>
+          </a:p>
+          <a:p>
+            <a:endParaRPr lang="en-GB" sz="2800" b="0" i="1" dirty="0">
+              <a:effectLst/>
+              <a:latin typeface="Goudy Old Style" panose="02020502050305020303" pitchFamily="18" charset="0"/>
+            </a:endParaRPr>
+          </a:p>
+        </p:txBody>
+      </p:sp>
+      <p:sp>
+        <p:nvSpPr>
+          <p:cNvPr id="10" name="TextBox 9">
+            <a:extLst>
+              <a:ext uri="{FF2B5EF4-FFF2-40B4-BE49-F238E27FC236}">
+                <a16:creationId xmlns:a16="http://schemas.microsoft.com/office/drawing/2014/main" id="{92FCD06A-3B25-42EB-9B4F-5B60985FF944}"/>
+              </a:ext>
+            </a:extLst>
+          </p:cNvPr>
+          <p:cNvSpPr txBox="1"/>
+          <p:nvPr/>
+        </p:nvSpPr>
+        <p:spPr>
+          <a:xfrm>
+            <a:off x="84665" y="4310392"/>
+            <a:ext cx="5630333" cy="954107"/>
+          </a:xfrm>
+          <a:prstGeom prst="rect">
+            <a:avLst/>
+          </a:prstGeom>
+          <a:noFill/>
+          <a:ln>
+            <a:solidFill>
+              <a:schemeClr val="tx1"/>
+            </a:solidFill>
+          </a:ln>
+        </p:spPr>
+        <p:txBody>
+          <a:bodyPr wrap="square">
+            <a:spAutoFit/>
+          </a:bodyPr>
+          <a:lstStyle/>
+          <a:p>
+            <a:r>
+              <a:rPr lang="en-GB" sz="2800" b="1" dirty="0">
+                <a:effectLst/>
+                <a:latin typeface="Goudy Old Style" panose="02020502050305020303" pitchFamily="18" charset="0"/>
+              </a:rPr>
+              <a:t>analytical outcomes</a:t>
+            </a:r>
+            <a:endParaRPr lang="en-GB" sz="2800" b="0" dirty="0">
+              <a:effectLst/>
+              <a:latin typeface="Goudy Old Style" panose="02020502050305020303" pitchFamily="18" charset="0"/>
+            </a:endParaRPr>
+          </a:p>
+          <a:p>
+            <a:endParaRPr lang="en-GB" sz="2800" b="0" i="1" dirty="0">
+              <a:effectLst/>
+              <a:latin typeface="Goudy Old Style" panose="02020502050305020303" pitchFamily="18" charset="0"/>
+            </a:endParaRPr>
+          </a:p>
+        </p:txBody>
+      </p:sp>
+    </p:spTree>
+    <p:extLst>
+      <p:ext uri="{BB962C8B-B14F-4D97-AF65-F5344CB8AC3E}">
+        <p14:creationId xmlns:p14="http://schemas.microsoft.com/office/powerpoint/2010/main" val="3494394856"/>
+      </p:ext>
+    </p:extLst>
+  </p:cSld>
+  <p:clrMapOvr>
+    <a:masterClrMapping/>
+  </p:clrMapOvr>
+</p:sld>
+</file>
+
 <file path=ppt/theme/theme1.xml><?xml version="1.0" encoding="utf-8"?>
 <a:theme xmlns:a="http://schemas.openxmlformats.org/drawingml/2006/main" name="Office Theme">
   <a:themeElements>
